--- a/docs/phase4/Dollar_Doodle- Phase_4.pptx
+++ b/docs/phase4/Dollar_Doodle- Phase_4.pptx
@@ -13418,12 +13418,12 @@
           <a:lstStyle/>
           <a:p>
             <a:r>
-              <a:rPr lang="en-US">
+              <a:rPr lang="en-US" dirty="0">
                 <a:solidFill>
                   <a:schemeClr val="tx2"/>
                 </a:solidFill>
               </a:rPr>
-              <a:t>Phase 3 Presentation</a:t>
+              <a:t>Phase 4 Presentation</a:t>
             </a:r>
           </a:p>
         </p:txBody>
